--- a/05-midterm-report/figures/midterm-figures.pptx
+++ b/05-midterm-report/figures/midterm-figures.pptx
@@ -2350,6 +2350,10 @@
             <a:prstDash val="solid"/>
           </a:ln>
         </p:spPr>
+        <p:txBody>
+          <a:bodyPr/>
+          <a:p/>
+        </p:txBody>
       </p:sp>
       <p:sp>
         <p:nvSpPr>
@@ -2547,6 +2551,10 @@
             <a:prstDash val="solid"/>
           </a:ln>
         </p:spPr>
+        <p:txBody>
+          <a:bodyPr/>
+          <a:p/>
+        </p:txBody>
       </p:sp>
       <p:sp>
         <p:nvSpPr>
@@ -2654,6 +2662,10 @@
             <a:prstDash val="solid"/>
           </a:ln>
         </p:spPr>
+        <p:txBody>
+          <a:bodyPr/>
+          <a:p/>
+        </p:txBody>
       </p:sp>
       <p:sp>
         <p:nvSpPr>
@@ -2949,6 +2961,10 @@
             <a:prstDash val="solid"/>
           </a:ln>
         </p:spPr>
+        <p:txBody>
+          <a:bodyPr/>
+          <a:p/>
+        </p:txBody>
       </p:sp>
       <p:sp>
         <p:nvSpPr>
@@ -3146,6 +3162,10 @@
             <a:prstDash val="solid"/>
           </a:ln>
         </p:spPr>
+        <p:txBody>
+          <a:bodyPr/>
+          <a:p/>
+        </p:txBody>
       </p:sp>
       <p:sp>
         <p:nvSpPr>
@@ -3253,6 +3273,10 @@
             <a:prstDash val="solid"/>
           </a:ln>
         </p:spPr>
+        <p:txBody>
+          <a:bodyPr/>
+          <a:p/>
+        </p:txBody>
       </p:sp>
       <p:sp>
         <p:nvSpPr>
@@ -3548,6 +3572,10 @@
             <a:prstDash val="solid"/>
           </a:ln>
         </p:spPr>
+        <p:txBody>
+          <a:bodyPr/>
+          <a:p/>
+        </p:txBody>
       </p:sp>
       <p:sp>
         <p:nvSpPr>
@@ -3745,6 +3773,10 @@
             <a:prstDash val="solid"/>
           </a:ln>
         </p:spPr>
+        <p:txBody>
+          <a:bodyPr/>
+          <a:p/>
+        </p:txBody>
       </p:sp>
       <p:sp>
         <p:nvSpPr>
@@ -3852,6 +3884,10 @@
             <a:prstDash val="solid"/>
           </a:ln>
         </p:spPr>
+        <p:txBody>
+          <a:bodyPr/>
+          <a:p/>
+        </p:txBody>
       </p:sp>
       <p:sp>
         <p:nvSpPr>
@@ -4147,6 +4183,10 @@
             <a:prstDash val="solid"/>
           </a:ln>
         </p:spPr>
+        <p:txBody>
+          <a:bodyPr/>
+          <a:p/>
+        </p:txBody>
       </p:sp>
       <p:sp>
         <p:nvSpPr>
@@ -4344,6 +4384,10 @@
             <a:prstDash val="solid"/>
           </a:ln>
         </p:spPr>
+        <p:txBody>
+          <a:bodyPr/>
+          <a:p/>
+        </p:txBody>
       </p:sp>
       <p:sp>
         <p:nvSpPr>
@@ -4451,6 +4495,10 @@
             <a:prstDash val="solid"/>
           </a:ln>
         </p:spPr>
+        <p:txBody>
+          <a:bodyPr/>
+          <a:p/>
+        </p:txBody>
       </p:sp>
       <p:sp>
         <p:nvSpPr>
@@ -4603,6 +4651,10 @@
             <a:prstDash val="solid"/>
           </a:ln>
         </p:spPr>
+        <p:txBody>
+          <a:bodyPr/>
+          <a:p/>
+        </p:txBody>
       </p:sp>
       <p:sp>
         <p:nvSpPr>
@@ -4704,6 +4756,10 @@
             <a:prstDash val="solid"/>
           </a:ln>
         </p:spPr>
+        <p:txBody>
+          <a:bodyPr/>
+          <a:p/>
+        </p:txBody>
       </p:sp>
       <p:sp>
         <p:nvSpPr>
@@ -6108,6 +6164,10 @@
             <a:prstDash val="solid"/>
           </a:ln>
         </p:spPr>
+        <p:txBody>
+          <a:bodyPr/>
+          <a:p/>
+        </p:txBody>
       </p:sp>
       <p:sp>
         <p:nvSpPr>
@@ -7522,6 +7582,10 @@
             <a:prstDash val="solid"/>
           </a:ln>
         </p:spPr>
+        <p:txBody>
+          <a:bodyPr/>
+          <a:p/>
+        </p:txBody>
       </p:sp>
       <p:sp>
         <p:nvSpPr>
@@ -7556,7 +7620,7 @@
                 <a:ea typeface="Times New Roman" pitchFamily="34" charset="-122"/>
                 <a:cs typeface="Times New Roman" pitchFamily="34" charset="-120"/>
               </a:rPr>
-              <a:t>Technology: Node.js + Express.js | SQLite (No Redis/MongoDB) | Memory Arrays (No BullMQ)</a:t>
+              <a:t>Technology: Node.js + Express.js | Memory Arrays + JSON (No Redis/MongoDB/BullMQ)</a:t>
             </a:r>
             <a:endParaRPr lang="en-US" sz="700" dirty="0"/>
           </a:p>
@@ -8689,6 +8753,10 @@
             <a:prstDash val="solid"/>
           </a:ln>
         </p:spPr>
+        <p:txBody>
+          <a:bodyPr/>
+          <a:p/>
+        </p:txBody>
       </p:sp>
       <p:sp>
         <p:nvSpPr>
@@ -9289,7 +9357,7 @@
                 <a:ea typeface="Times New Roman" pitchFamily="34" charset="-122"/>
                 <a:cs typeface="Times New Roman" pitchFamily="34" charset="-120"/>
               </a:rPr>
-              <a:t> Priority(A) = Priority(B) → RR</a:t>
+              <a:t> Priority(A) = Priority(B) → FCFS (도착 순서)</a:t>
             </a:r>
             <a:endParaRPr lang="en-US" sz="800" dirty="0"/>
           </a:p>
@@ -9512,6 +9580,10 @@
             <a:prstDash val="solid"/>
           </a:ln>
         </p:spPr>
+        <p:txBody>
+          <a:bodyPr/>
+          <a:p/>
+        </p:txBody>
       </p:sp>
       <p:sp>
         <p:nvSpPr>
@@ -11103,6 +11175,10 @@
             <a:prstDash val="solid"/>
           </a:ln>
         </p:spPr>
+        <p:txBody>
+          <a:bodyPr/>
+          <a:p/>
+        </p:txBody>
       </p:sp>
       <p:sp>
         <p:nvSpPr>
@@ -11384,6 +11460,10 @@
             <a:prstDash val="solid"/>
           </a:ln>
         </p:spPr>
+        <p:txBody>
+          <a:bodyPr/>
+          <a:p/>
+        </p:txBody>
       </p:sp>
       <p:sp>
         <p:nvSpPr>
@@ -11478,6 +11558,10 @@
             <a:prstDash val="solid"/>
           </a:ln>
         </p:spPr>
+        <p:txBody>
+          <a:bodyPr/>
+          <a:p/>
+        </p:txBody>
       </p:sp>
       <p:sp>
         <p:nvSpPr>
@@ -11540,6 +11624,10 @@
             <a:prstDash val="solid"/>
           </a:ln>
         </p:spPr>
+        <p:txBody>
+          <a:bodyPr/>
+          <a:p/>
+        </p:txBody>
       </p:sp>
       <p:sp>
         <p:nvSpPr>
@@ -11884,7 +11972,7 @@
                 <a:ea typeface="Times New Roman" pitchFamily="34" charset="-122"/>
                 <a:cs typeface="Times New Roman" pitchFamily="34" charset="-120"/>
               </a:rPr>
-              <a:t>95% CI: [72.36, 75.20]</a:t>
+              <a:t/>
             </a:r>
             <a:endParaRPr lang="en-US" sz="800" dirty="0"/>
           </a:p>
@@ -12266,7 +12354,7 @@
                 <a:ea typeface="Times New Roman" pitchFamily="34" charset="-122"/>
                 <a:cs typeface="Times New Roman" pitchFamily="34" charset="-120"/>
               </a:rPr>
-              <a:t>p &lt; 0.001</a:t>
+              <a:t/>
             </a:r>
             <a:endParaRPr lang="en-US" sz="800" dirty="0"/>
           </a:p>
@@ -12305,7 +12393,7 @@
                 <a:ea typeface="Times New Roman" pitchFamily="34" charset="-122"/>
                 <a:cs typeface="Times New Roman" pitchFamily="34" charset="-120"/>
               </a:rPr>
-              <a:t>Cohen's d = 15.905</a:t>
+              <a:t/>
             </a:r>
             <a:endParaRPr lang="en-US" sz="800" dirty="0"/>
           </a:p>
@@ -12333,6 +12421,10 @@
             <a:prstDash val="solid"/>
           </a:ln>
         </p:spPr>
+        <p:txBody>
+          <a:bodyPr/>
+          <a:p/>
+        </p:txBody>
       </p:sp>
       <p:sp>
         <p:nvSpPr>
@@ -12459,6 +12551,10 @@
             <a:prstDash val="solid"/>
           </a:ln>
         </p:spPr>
+        <p:txBody>
+          <a:bodyPr/>
+          <a:p/>
+        </p:txBody>
       </p:sp>
       <p:sp>
         <p:nvSpPr>
@@ -12633,6 +12729,10 @@
             <a:prstDash val="solid"/>
           </a:ln>
         </p:spPr>
+        <p:txBody>
+          <a:bodyPr/>
+          <a:p/>
+        </p:txBody>
       </p:sp>
       <p:sp>
         <p:nvSpPr>
@@ -12734,6 +12834,10 @@
             <a:prstDash val="solid"/>
           </a:ln>
         </p:spPr>
+        <p:txBody>
+          <a:bodyPr/>
+          <a:p/>
+        </p:txBody>
       </p:sp>
       <p:sp>
         <p:nvSpPr>
@@ -12757,6 +12861,10 @@
             <a:prstDash val="solid"/>
           </a:ln>
         </p:spPr>
+        <p:txBody>
+          <a:bodyPr/>
+          <a:p/>
+        </p:txBody>
       </p:sp>
       <p:sp>
         <p:nvSpPr>
@@ -12780,6 +12888,10 @@
             <a:prstDash val="solid"/>
           </a:ln>
         </p:spPr>
+        <p:txBody>
+          <a:bodyPr/>
+          <a:p/>
+        </p:txBody>
       </p:sp>
       <p:sp>
         <p:nvSpPr>
@@ -12881,6 +12993,10 @@
             <a:prstDash val="solid"/>
           </a:ln>
         </p:spPr>
+        <p:txBody>
+          <a:bodyPr/>
+          <a:p/>
+        </p:txBody>
       </p:sp>
       <p:sp>
         <p:nvSpPr>
@@ -13012,6 +13128,10 @@
             <a:prstDash val="solid"/>
           </a:ln>
         </p:spPr>
+        <p:txBody>
+          <a:bodyPr/>
+          <a:p/>
+        </p:txBody>
       </p:sp>
       <p:sp>
         <p:nvSpPr>
@@ -13035,6 +13155,10 @@
             <a:prstDash val="solid"/>
           </a:ln>
         </p:spPr>
+        <p:txBody>
+          <a:bodyPr/>
+          <a:p/>
+        </p:txBody>
       </p:sp>
       <p:sp>
         <p:nvSpPr>
@@ -13058,6 +13182,10 @@
             <a:prstDash val="solid"/>
           </a:ln>
         </p:spPr>
+        <p:txBody>
+          <a:bodyPr/>
+          <a:p/>
+        </p:txBody>
       </p:sp>
       <p:sp>
         <p:nvSpPr>
@@ -13159,6 +13287,10 @@
             <a:prstDash val="solid"/>
           </a:ln>
         </p:spPr>
+        <p:txBody>
+          <a:bodyPr/>
+          <a:p/>
+        </p:txBody>
       </p:sp>
       <p:sp>
         <p:nvSpPr>
@@ -13260,6 +13392,10 @@
             <a:prstDash val="solid"/>
           </a:ln>
         </p:spPr>
+        <p:txBody>
+          <a:bodyPr/>
+          <a:p/>
+        </p:txBody>
       </p:sp>
       <p:sp>
         <p:nvSpPr>
@@ -13283,6 +13419,10 @@
             <a:prstDash val="solid"/>
           </a:ln>
         </p:spPr>
+        <p:txBody>
+          <a:bodyPr/>
+          <a:p/>
+        </p:txBody>
       </p:sp>
       <p:sp>
         <p:nvSpPr>
@@ -13306,6 +13446,10 @@
             <a:prstDash val="solid"/>
           </a:ln>
         </p:spPr>
+        <p:txBody>
+          <a:bodyPr/>
+          <a:p/>
+        </p:txBody>
       </p:sp>
       <p:sp>
         <p:nvSpPr>
@@ -13407,6 +13551,10 @@
             <a:prstDash val="solid"/>
           </a:ln>
         </p:spPr>
+        <p:txBody>
+          <a:bodyPr/>
+          <a:p/>
+        </p:txBody>
       </p:sp>
       <p:sp>
         <p:nvSpPr>
@@ -13538,6 +13686,10 @@
             <a:prstDash val="solid"/>
           </a:ln>
         </p:spPr>
+        <p:txBody>
+          <a:bodyPr/>
+          <a:p/>
+        </p:txBody>
       </p:sp>
       <p:sp>
         <p:nvSpPr>
@@ -13561,6 +13713,10 @@
             <a:prstDash val="solid"/>
           </a:ln>
         </p:spPr>
+        <p:txBody>
+          <a:bodyPr/>
+          <a:p/>
+        </p:txBody>
       </p:sp>
       <p:sp>
         <p:nvSpPr>
@@ -13584,6 +13740,10 @@
             <a:prstDash val="solid"/>
           </a:ln>
         </p:spPr>
+        <p:txBody>
+          <a:bodyPr/>
+          <a:p/>
+        </p:txBody>
       </p:sp>
       <p:sp>
         <p:nvSpPr>
@@ -13685,6 +13845,10 @@
             <a:prstDash val="solid"/>
           </a:ln>
         </p:spPr>
+        <p:txBody>
+          <a:bodyPr/>
+          <a:p/>
+        </p:txBody>
       </p:sp>
       <p:sp>
         <p:nvSpPr>
@@ -13786,6 +13950,10 @@
             <a:prstDash val="solid"/>
           </a:ln>
         </p:spPr>
+        <p:txBody>
+          <a:bodyPr/>
+          <a:p/>
+        </p:txBody>
       </p:sp>
       <p:sp>
         <p:nvSpPr>
@@ -13809,6 +13977,10 @@
             <a:prstDash val="solid"/>
           </a:ln>
         </p:spPr>
+        <p:txBody>
+          <a:bodyPr/>
+          <a:p/>
+        </p:txBody>
       </p:sp>
       <p:sp>
         <p:nvSpPr>
@@ -13832,6 +14004,10 @@
             <a:prstDash val="solid"/>
           </a:ln>
         </p:spPr>
+        <p:txBody>
+          <a:bodyPr/>
+          <a:p/>
+        </p:txBody>
       </p:sp>
       <p:sp>
         <p:nvSpPr>
@@ -13933,6 +14109,10 @@
             <a:prstDash val="solid"/>
           </a:ln>
         </p:spPr>
+        <p:txBody>
+          <a:bodyPr/>
+          <a:p/>
+        </p:txBody>
       </p:sp>
       <p:sp>
         <p:nvSpPr>
@@ -14479,7 +14659,7 @@
                 <a:ea typeface="Times New Roman" pitchFamily="34" charset="-122"/>
                 <a:cs typeface="Times New Roman" pitchFamily="34" charset="-120"/>
               </a:rPr>
-              <a:t>통계적 유의성</a:t>
+              <a:t/>
             </a:r>
             <a:endParaRPr lang="en-US" sz="900" dirty="0"/>
           </a:p>
@@ -14524,7 +14704,7 @@
                 <a:ea typeface="Times New Roman" pitchFamily="34" charset="-122"/>
                 <a:cs typeface="Times New Roman" pitchFamily="34" charset="-120"/>
               </a:rPr>
-              <a:t>95% CI: </a:t>
+              <a:t/>
             </a:r>
             <a:pPr algn="l" indent="0" marL="0">
               <a:spcBef>
@@ -14589,7 +14769,7 @@
                 <a:ea typeface="Times New Roman" pitchFamily="34" charset="-122"/>
                 <a:cs typeface="Times New Roman" pitchFamily="34" charset="-120"/>
               </a:rPr>
-              <a:t>p-value: </a:t>
+              <a:t/>
             </a:r>
             <a:pPr algn="l" indent="0" marL="0">
               <a:spcBef>
@@ -14654,7 +14834,7 @@
                 <a:ea typeface="Times New Roman" pitchFamily="34" charset="-122"/>
                 <a:cs typeface="Times New Roman" pitchFamily="34" charset="-120"/>
               </a:rPr>
-              <a:t>Cohen's d: </a:t>
+              <a:t/>
             </a:r>
             <a:pPr algn="l" indent="0" marL="0">
               <a:spcBef>
@@ -14817,6 +14997,10 @@
             <a:prstDash val="solid"/>
           </a:ln>
         </p:spPr>
+        <p:txBody>
+          <a:bodyPr/>
+          <a:p/>
+        </p:txBody>
       </p:sp>
       <p:sp>
         <p:nvSpPr>

--- a/05-midterm-report/figures/midterm-figures.pptx
+++ b/05-midterm-report/figures/midterm-figures.pptx
@@ -684,7 +684,7 @@
                 <c:formatCode>General</c:formatCode>
                 <c:ptCount val="1"/>
                 <c:pt idx="0">
-                  <c:v>634</c:v>
+                  <c:v>635</c:v>
                 </c:pt>
               </c:numCache>
             </c:numRef>
@@ -755,7 +755,7 @@
                 <c:formatCode>General</c:formatCode>
                 <c:ptCount val="1"/>
                 <c:pt idx="0">
-                  <c:v>172</c:v>
+                  <c:v>170</c:v>
                 </c:pt>
               </c:numCache>
             </c:numRef>

--- a/05-midterm-report/figures/midterm-figures.pptx
+++ b/05-midterm-report/figures/midterm-figures.pptx
@@ -671,7 +671,7 @@
                 <c:ptCount val="1"/>
                 <c:lvl>
                   <c:pt idx="0">
-                    <c:v>짧은 요청 평균 대기시간</c:v>
+                    <c:v>짧은 요청 평균 응답시간</c:v>
                   </c:pt>
                 </c:lvl>
               </c:multiLvlStrCache>
@@ -742,7 +742,7 @@
                 <c:ptCount val="1"/>
                 <c:lvl>
                   <c:pt idx="0">
-                    <c:v>짧은 요청 평균 대기시간</c:v>
+                    <c:v>짧은 요청 평균 응답시간</c:v>
                   </c:pt>
                 </c:lvl>
               </c:multiLvlStrCache>
@@ -8494,7 +8494,7 @@
                 <a:ea typeface="맑은 고딕" pitchFamily="34" charset="-122"/>
                 <a:cs typeface="맑은 고딕" pitchFamily="34" charset="-120"/>
               </a:rPr>
-              <a:t>(c) MLFQ 선점형 효과 — 짧은 요청 대기시간 (5회 반복)</a:t>
+              <a:t>(c) MLFQ 선점형 효과 — 짧은 요청 응답시간 (5회 반복)</a:t>
             </a:r>
             <a:endParaRPr lang="en-US" sz="1100" dirty="0"/>
           </a:p>

--- a/05-midterm-report/figures/midterm-figures.pptx
+++ b/05-midterm-report/figures/midterm-figures.pptx
@@ -8439,7 +8439,7 @@
                 <a:ea typeface="맑은 고딕" pitchFamily="34" charset="-122"/>
                 <a:cs typeface="맑은 고딕" pitchFamily="34" charset="-120"/>
               </a:rPr>
-              <a:t>(b) WFQ 등급별 대기시간</a:t>
+              <a:t>(b) WFQ 등급별 대기시간 (ms)</a:t>
             </a:r>
             <a:endParaRPr lang="en-US" sz="1100" dirty="0"/>
           </a:p>
